--- a/inbox/Application Aware Networking/Book_00_FedAAN_Executive_Summary.pptx
+++ b/inbox/Application Aware Networking/Book_00_FedAAN_Executive_Summary.pptx
@@ -26,6 +26,7 @@
     <p:sldId id="274" r:id="rId20"/>
     <p:sldId id="275" r:id="rId21"/>
     <p:sldId id="276" r:id="rId22"/>
+    <p:sldId id="277" r:id="rId28"/>
   </p:sldIdLst>
   <p:notesMasterIdLst>
     <p:notesMasterId r:id="rId23"/>
@@ -1818,6 +1819,82 @@
         <p14:creationId xmlns:p14="http://schemas.microsoft.com/office/powerpoint/2010/main" val="1024086991"/>
       </p:ext>
     </p:extLst>
+  </p:cSld>
+  <p:clrMapOvr>
+    <a:masterClrMapping/>
+  </p:clrMapOvr>
+</p:notes>
+</file>
+
+<file path=ppt/notesSlides/notesSlide22.xml><?xml version="1.0" encoding="utf-8"?>
+<p:notes xmlns:a="http://schemas.openxmlformats.org/drawingml/2006/main" xmlns:p="http://schemas.openxmlformats.org/presentationml/2006/main" xmlns:r="http://schemas.openxmlformats.org/officeDocument/2006/relationships">
+  <p:cSld>
+    <p:spTree>
+      <p:nvGrpSpPr>
+        <p:cNvPr id="1" name=""/>
+        <p:cNvGrpSpPr/>
+        <p:nvPr/>
+      </p:nvGrpSpPr>
+      <p:grpSpPr>
+        <a:xfrm>
+          <a:off x="0" y="0"/>
+          <a:ext cx="0" cy="0"/>
+          <a:chOff x="0" y="0"/>
+          <a:chExt cx="0" cy="0"/>
+        </a:xfrm>
+      </p:grpSpPr>
+      <p:sp>
+        <p:nvSpPr>
+          <p:cNvPr id="2" name="Slide Image Placeholder 1"/>
+          <p:cNvSpPr>
+            <a:spLocks noGrp="1"/>
+          </p:cNvSpPr>
+          <p:nvPr>
+            <p:ph type="sldImg" idx="2"/>
+          </p:nvPr>
+        </p:nvSpPr>
+        <p:spPr/>
+      </p:sp>
+      <p:sp>
+        <p:nvSpPr>
+          <p:cNvPr id="3" name="Notes Placeholder 2"/>
+          <p:cNvSpPr>
+            <a:spLocks noGrp="1"/>
+          </p:cNvSpPr>
+          <p:nvPr>
+            <p:ph type="body" idx="3" sz="quarter"/>
+          </p:nvPr>
+        </p:nvSpPr>
+        <p:spPr/>
+        <p:txBody>
+          <a:bodyPr/>
+          <a:lstStyle/>
+          <a:p>
+            <a:r>
+              <a:t>The federal compliance clock — added in the 2026-07-07 timeline pass. The fully-sourced version, including the elapsed baseline, lives in the Federal AAN / ConMon Gap Roadmap — the series' single source of truth for federal dates. Walk the rows: August 3 and 31, 2026 — FedRAMP 20x submission windows open, Class A first, then Class B and C, the GCC Moderate window; marketplace listings opened July 6, FedRAMP Ready went legacy July 28, and temporary Rev5 conversion paths opened August 10. August 7, 2026 — BOD 26-04 (issued June 10, 2026) requires agency vulnerability-management policies to support risk-based remediation under its four-variable model (exposure, KEV listing, exploit automatability, technical impact) with timelines from 3 days to deferral. September 21, 2026 — every FIPS 140-2 certificate moves to NIST's Historical List, ending new procurement reliance on 140-2-only modules; verify FIPS 140-3 tracking. December 7, 2026 — BOD 26-04's remediation timelines take force AND FedRAMP's VDR/VER rules become mandatory: SBOM plus vendor disclosure (the Part 15 pipeline; KSI-011..014 become evaluable). January 1, 2027 — the Consolidated Rules become mandatory for all FedRAMP systems, and CNSA 2.0's acquisition gate opens for National Security Systems (ML-KEM-1024, ML-DSA-87; NSS-scoped, civilian trajectory follows via M-23-02). June 11, 2027 — no new Rev5 certifications. Around August 2027 — the next scheduled NIST 800-53 release on the two-year cadence; Release 5.2.0 (August 27, 2025) already added SA-15(13), SA-24, and SI-2(7), which are not yet mapped in Parts 11/15 — a tracked action item in the roadmap. 2030 and 2035 — quantum-vulnerable cryptography deprecated, then prohibited; M-23-02's annual inventories run to that horizon. The bottom bar lists the mandates already in force: M-21-31 logging tiers, M-21-07 IPv6 targets, M-22-09 Zero Trust (goals past due but still measured via FISMA/CDM), and BOD 25-01 SCuBA policies.</a:t>
+            </a:r>
+          </a:p>
+          <a:p/>
+          <a:p>
+            <a:r>
+              <a:t>Vendor sources: https://www.fedramp.gov/20x/ | https://www.cisa.gov/news-events/directives/bod-26-04-prioritizing-security-updates-based-risk | https://csrc.nist.gov/News/2025/nist-releases-revision-to-sp-800-53-controls | uiao repo: inbox/Application Aware Networking/federal-aan-conmon-gap-roadmap.md</a:t>
+            </a:r>
+          </a:p>
+        </p:txBody>
+      </p:sp>
+      <p:sp>
+        <p:nvSpPr>
+          <p:cNvPr id="4" name="Slide Number Placeholder 3"/>
+          <p:cNvSpPr>
+            <a:spLocks noGrp="1"/>
+          </p:cNvSpPr>
+          <p:nvPr>
+            <p:ph type="sldNum" idx="5" sz="quarter"/>
+          </p:nvPr>
+        </p:nvSpPr>
+        <p:spPr/>
+      </p:sp>
+    </p:spTree>
   </p:cSld>
   <p:clrMapOvr>
     <a:masterClrMapping/>
@@ -3025,7 +3102,7 @@
                 <a:ea typeface="Calibri" pitchFamily="34" charset="-122"/>
                 <a:cs typeface="Calibri" pitchFamily="34" charset="-120"/>
               </a:rPr>
-              <a:t>NIST SP 800-53 Rev 5  ·  FedRAMP 20x Consolidated Rules (June 25, 2026)  ·  Mandatory January 1, 2027  ·  Date Code 2026-07-07 09:58 ET</a:t>
+              <a:t>NIST SP 800-53 Rev 5  ·  FedRAMP 20x Consolidated Rules (June 25, 2026)  ·  Mandatory January 1, 2027  ·  Date Code 2026-07-07 11:59 ET</a:t>
             </a:r>
             <a:endParaRPr lang="en-US" sz="1200" dirty="0"/>
           </a:p>
@@ -3096,7 +3173,7 @@
                 <a:ea typeface="Calibri" pitchFamily="34" charset="-122"/>
                 <a:cs typeface="Calibri" pitchFamily="34" charset="-120"/>
               </a:rPr>
-              <a:t>Federal AAN — Executive Summary  ·  CSI Team Draft — Internal, Not for Public Distribution  ·  Date Code 2026-07-07 09:58 ET</a:t>
+              <a:t>Federal AAN — Executive Summary  ·  CSI Team Draft — Internal, Not for Public Distribution  ·  Date Code 2026-07-07 11:59 ET</a:t>
             </a:r>
             <a:endParaRPr lang="en-US" sz="900" dirty="0"/>
           </a:p>
@@ -3308,7 +3385,7 @@
                 <a:ea typeface="Calibri" pitchFamily="34" charset="-122"/>
                 <a:cs typeface="Calibri" pitchFamily="34" charset="-120"/>
               </a:rPr>
-              <a:t>Federal AAN — Executive Summary  ·  CSI Team Draft — Internal, Not for Public Distribution  ·  Date Code 2026-07-07 09:58 ET</a:t>
+              <a:t>Federal AAN — Executive Summary  ·  CSI Team Draft — Internal, Not for Public Distribution  ·  Date Code 2026-07-07 11:59 ET</a:t>
             </a:r>
             <a:endParaRPr lang="en-US" sz="900" dirty="0"/>
           </a:p>
@@ -3520,7 +3597,7 @@
                 <a:ea typeface="Calibri" pitchFamily="34" charset="-122"/>
                 <a:cs typeface="Calibri" pitchFamily="34" charset="-120"/>
               </a:rPr>
-              <a:t>Federal AAN — Executive Summary  ·  CSI Team Draft — Internal, Not for Public Distribution  ·  Date Code 2026-07-07 09:58 ET</a:t>
+              <a:t>Federal AAN — Executive Summary  ·  CSI Team Draft — Internal, Not for Public Distribution  ·  Date Code 2026-07-07 11:59 ET</a:t>
             </a:r>
             <a:endParaRPr lang="en-US" sz="900" dirty="0"/>
           </a:p>
@@ -3771,7 +3848,7 @@
                 <a:ea typeface="Calibri" pitchFamily="34" charset="-122"/>
                 <a:cs typeface="Calibri" pitchFamily="34" charset="-120"/>
               </a:rPr>
-              <a:t>Federal AAN — Executive Summary  ·  CSI Team Draft — Internal, Not for Public Distribution  ·  Date Code 2026-07-07 09:58 ET</a:t>
+              <a:t>Federal AAN — Executive Summary  ·  CSI Team Draft — Internal, Not for Public Distribution  ·  Date Code 2026-07-07 11:59 ET</a:t>
             </a:r>
             <a:endParaRPr lang="en-US" sz="900" dirty="0"/>
           </a:p>
@@ -3983,7 +4060,7 @@
                 <a:ea typeface="Calibri" pitchFamily="34" charset="-122"/>
                 <a:cs typeface="Calibri" pitchFamily="34" charset="-120"/>
               </a:rPr>
-              <a:t>Federal AAN — Executive Summary  ·  CSI Team Draft — Internal, Not for Public Distribution  ·  Date Code 2026-07-07 09:58 ET</a:t>
+              <a:t>Federal AAN — Executive Summary  ·  CSI Team Draft — Internal, Not for Public Distribution  ·  Date Code 2026-07-07 11:59 ET</a:t>
             </a:r>
             <a:endParaRPr lang="en-US" sz="900" dirty="0"/>
           </a:p>
@@ -4195,7 +4272,7 @@
                 <a:ea typeface="Calibri" pitchFamily="34" charset="-122"/>
                 <a:cs typeface="Calibri" pitchFamily="34" charset="-120"/>
               </a:rPr>
-              <a:t>Federal AAN — Executive Summary  ·  CSI Team Draft — Internal, Not for Public Distribution  ·  Date Code 2026-07-07 09:58 ET</a:t>
+              <a:t>Federal AAN — Executive Summary  ·  CSI Team Draft — Internal, Not for Public Distribution  ·  Date Code 2026-07-07 11:59 ET</a:t>
             </a:r>
             <a:endParaRPr lang="en-US" sz="900" dirty="0"/>
           </a:p>
@@ -4407,7 +4484,7 @@
                 <a:ea typeface="Calibri" pitchFamily="34" charset="-122"/>
                 <a:cs typeface="Calibri" pitchFamily="34" charset="-120"/>
               </a:rPr>
-              <a:t>Federal AAN — Executive Summary  ·  CSI Team Draft — Internal, Not for Public Distribution  ·  Date Code 2026-07-07 09:58 ET</a:t>
+              <a:t>Federal AAN — Executive Summary  ·  CSI Team Draft — Internal, Not for Public Distribution  ·  Date Code 2026-07-07 11:59 ET</a:t>
             </a:r>
             <a:endParaRPr lang="en-US" sz="900" dirty="0"/>
           </a:p>
@@ -4619,7 +4696,7 @@
                 <a:ea typeface="Calibri" pitchFamily="34" charset="-122"/>
                 <a:cs typeface="Calibri" pitchFamily="34" charset="-120"/>
               </a:rPr>
-              <a:t>Federal AAN — Executive Summary  ·  CSI Team Draft — Internal, Not for Public Distribution  ·  Date Code 2026-07-07 09:58 ET</a:t>
+              <a:t>Federal AAN — Executive Summary  ·  CSI Team Draft — Internal, Not for Public Distribution  ·  Date Code 2026-07-07 11:59 ET</a:t>
             </a:r>
             <a:endParaRPr lang="en-US" sz="900" dirty="0"/>
           </a:p>
@@ -4831,7 +4908,7 @@
                 <a:ea typeface="Calibri" pitchFamily="34" charset="-122"/>
                 <a:cs typeface="Calibri" pitchFamily="34" charset="-120"/>
               </a:rPr>
-              <a:t>Federal AAN — Executive Summary  ·  CSI Team Draft — Internal, Not for Public Distribution  ·  Date Code 2026-07-07 09:58 ET</a:t>
+              <a:t>Federal AAN — Executive Summary  ·  CSI Team Draft — Internal, Not for Public Distribution  ·  Date Code 2026-07-07 11:59 ET</a:t>
             </a:r>
             <a:endParaRPr lang="en-US" sz="900" dirty="0"/>
           </a:p>
@@ -5043,7 +5120,7 @@
                 <a:ea typeface="Calibri" pitchFamily="34" charset="-122"/>
                 <a:cs typeface="Calibri" pitchFamily="34" charset="-120"/>
               </a:rPr>
-              <a:t>Federal AAN — Executive Summary  ·  CSI Team Draft — Internal, Not for Public Distribution  ·  Date Code 2026-07-07 09:58 ET</a:t>
+              <a:t>Federal AAN — Executive Summary  ·  CSI Team Draft — Internal, Not for Public Distribution  ·  Date Code 2026-07-07 11:59 ET</a:t>
             </a:r>
             <a:endParaRPr lang="en-US" sz="900" dirty="0"/>
           </a:p>
@@ -7012,7 +7089,7 @@
                 <a:ea typeface="Calibri" pitchFamily="34" charset="-122"/>
                 <a:cs typeface="Calibri" pitchFamily="34" charset="-120"/>
               </a:rPr>
-              <a:t>Federal AAN — Executive Summary  ·  CSI Team Draft — Internal, Not for Public Distribution  ·  Date Code 2026-07-07 09:58 ET</a:t>
+              <a:t>Federal AAN — Executive Summary  ·  CSI Team Draft — Internal, Not for Public Distribution  ·  Date Code 2026-07-07 11:59 ET</a:t>
             </a:r>
             <a:endParaRPr lang="en-US" sz="900" dirty="0"/>
           </a:p>
@@ -8063,7 +8140,7 @@
                 <a:ea typeface="Calibri" pitchFamily="34" charset="-122"/>
                 <a:cs typeface="Calibri" pitchFamily="34" charset="-120"/>
               </a:rPr>
-              <a:t>Federal AAN — Executive Summary  ·  CSI Team Draft — Internal, Not for Public Distribution  ·  Date Code 2026-07-07 09:58 ET</a:t>
+              <a:t>Federal AAN — Executive Summary  ·  CSI Team Draft — Internal, Not for Public Distribution  ·  Date Code 2026-07-07 11:59 ET</a:t>
             </a:r>
             <a:endParaRPr lang="en-US" sz="900" dirty="0"/>
           </a:p>
@@ -8275,7 +8352,7 @@
                 <a:ea typeface="Calibri" pitchFamily="34" charset="-122"/>
                 <a:cs typeface="Calibri" pitchFamily="34" charset="-120"/>
               </a:rPr>
-              <a:t>Federal AAN — Executive Summary  ·  CSI Team Draft — Internal, Not for Public Distribution  ·  Date Code 2026-07-07 09:58 ET</a:t>
+              <a:t>Federal AAN — Executive Summary  ·  CSI Team Draft — Internal, Not for Public Distribution  ·  Date Code 2026-07-07 11:59 ET</a:t>
             </a:r>
             <a:endParaRPr lang="en-US" sz="900" dirty="0"/>
           </a:p>
@@ -8484,6 +8561,1237 @@
               <a:t>Next step: formal alignment. CIO Office, OIS, organizational leaders, and program offices must review, revise, and own this roadmap — the January 1, 2027 date does not move while they do.</a:t>
             </a:r>
             <a:endParaRPr lang="en-US" sz="1500" dirty="0"/>
+          </a:p>
+        </p:txBody>
+      </p:sp>
+    </p:spTree>
+  </p:cSld>
+  <p:clrMapOvr>
+    <a:masterClrMapping/>
+  </p:clrMapOvr>
+</p:sld>
+</file>
+
+<file path=ppt/slides/slide22.xml><?xml version="1.0" encoding="utf-8"?>
+<p:sld xmlns:a="http://schemas.openxmlformats.org/drawingml/2006/main" xmlns:p="http://schemas.openxmlformats.org/presentationml/2006/main" xmlns:r="http://schemas.openxmlformats.org/officeDocument/2006/relationships">
+  <p:cSld>
+    <p:spTree>
+      <p:nvGrpSpPr>
+        <p:cNvPr id="1" name=""/>
+        <p:cNvGrpSpPr/>
+        <p:nvPr/>
+      </p:nvGrpSpPr>
+      <p:grpSpPr/>
+      <p:sp>
+        <p:nvSpPr>
+          <p:cNvPr id="2" name="TextBox 1"/>
+          <p:cNvSpPr txBox="1"/>
+          <p:nvPr/>
+        </p:nvSpPr>
+        <p:spPr>
+          <a:xfrm>
+            <a:off x="521207" y="256032"/>
+            <a:ext cx="11155680" cy="548640"/>
+          </a:xfrm>
+          <a:prstGeom prst="rect">
+            <a:avLst/>
+          </a:prstGeom>
+          <a:noFill/>
+        </p:spPr>
+        <p:txBody>
+          <a:bodyPr wrap="square" lIns="0" rIns="0" tIns="0" bIns="0">
+            <a:spAutoFit/>
+          </a:bodyPr>
+          <a:lstStyle/>
+          <a:p>
+            <a:r>
+              <a:rPr sz="3000" b="1">
+                <a:solidFill>
+                  <a:srgbClr val="0D1B2E"/>
+                </a:solidFill>
+                <a:latin typeface="Cambria"/>
+              </a:rPr>
+              <a:t>The Federal Compliance Clock</a:t>
+            </a:r>
+          </a:p>
+        </p:txBody>
+      </p:sp>
+      <p:sp>
+        <p:nvSpPr>
+          <p:cNvPr id="3" name="TextBox 2"/>
+          <p:cNvSpPr txBox="1"/>
+          <p:nvPr/>
+        </p:nvSpPr>
+        <p:spPr>
+          <a:xfrm>
+            <a:off x="521207" y="841248"/>
+            <a:ext cx="11155680" cy="320040"/>
+          </a:xfrm>
+          <a:prstGeom prst="rect">
+            <a:avLst/>
+          </a:prstGeom>
+          <a:noFill/>
+        </p:spPr>
+        <p:txBody>
+          <a:bodyPr wrap="square" lIns="0" rIns="0" tIns="0" bIns="0">
+            <a:spAutoFit/>
+          </a:bodyPr>
+          <a:lstStyle/>
+          <a:p>
+            <a:r>
+              <a:rPr sz="1400" b="0">
+                <a:solidFill>
+                  <a:srgbClr val="6B7A8D"/>
+                </a:solidFill>
+                <a:latin typeface="Calibri"/>
+              </a:rPr>
+              <a:t>Every deadline running against the controls this series closes — SSOT: the Federal AAN / ConMon Gap Roadmap (verified 2026-07-07)</a:t>
+            </a:r>
+          </a:p>
+        </p:txBody>
+      </p:sp>
+      <p:sp>
+        <p:nvSpPr>
+          <p:cNvPr id="4" name="Oval 3"/>
+          <p:cNvSpPr/>
+          <p:nvPr/>
+        </p:nvSpPr>
+        <p:spPr>
+          <a:xfrm>
+            <a:off x="658368" y="1463040"/>
+            <a:ext cx="146304" cy="146304"/>
+          </a:xfrm>
+          <a:prstGeom prst="ellipse">
+            <a:avLst/>
+          </a:prstGeom>
+          <a:solidFill>
+            <a:srgbClr val="1A9E8F"/>
+          </a:solidFill>
+          <a:ln>
+            <a:noFill/>
+          </a:ln>
+        </p:spPr>
+        <p:style>
+          <a:lnRef idx="1">
+            <a:schemeClr val="accent1"/>
+          </a:lnRef>
+          <a:fillRef idx="3">
+            <a:schemeClr val="accent1"/>
+          </a:fillRef>
+          <a:effectRef idx="2">
+            <a:schemeClr val="accent1"/>
+          </a:effectRef>
+          <a:fontRef idx="minor">
+            <a:schemeClr val="lt1"/>
+          </a:fontRef>
+        </p:style>
+        <p:txBody>
+          <a:bodyPr rtlCol="0" anchor="ctr"/>
+          <a:lstStyle/>
+          <a:p>
+            <a:pPr algn="ctr"/>
+          </a:p>
+        </p:txBody>
+      </p:sp>
+      <p:sp>
+        <p:nvSpPr>
+          <p:cNvPr id="5" name="TextBox 4"/>
+          <p:cNvSpPr txBox="1"/>
+          <p:nvPr/>
+        </p:nvSpPr>
+        <p:spPr>
+          <a:xfrm>
+            <a:off x="960120" y="1417320"/>
+            <a:ext cx="10607040" cy="502920"/>
+          </a:xfrm>
+          <a:prstGeom prst="rect">
+            <a:avLst/>
+          </a:prstGeom>
+          <a:noFill/>
+        </p:spPr>
+        <p:txBody>
+          <a:bodyPr wrap="square" lIns="0" rIns="0" tIns="0" bIns="0">
+            <a:spAutoFit/>
+          </a:bodyPr>
+          <a:lstStyle/>
+          <a:p>
+            <a:r>
+              <a:rPr sz="1300" b="1">
+                <a:solidFill>
+                  <a:srgbClr val="1A9E8F"/>
+                </a:solidFill>
+                <a:latin typeface="Calibri"/>
+              </a:rPr>
+              <a:t>Aug 3 / 31, 2026   </a:t>
+            </a:r>
+            <a:r>
+              <a:rPr sz="1200" b="0">
+                <a:solidFill>
+                  <a:srgbClr val="1E293B"/>
+                </a:solidFill>
+                <a:latin typeface="Calibri"/>
+              </a:rPr>
+              <a:t>FedRAMP 20x opens — Class A, then Class B + C: the GCC Moderate window (marketplace Jul 6; Ready legacy Jul 28; Rev5 conversion Aug 10)</a:t>
+            </a:r>
+          </a:p>
+        </p:txBody>
+      </p:sp>
+      <p:sp>
+        <p:nvSpPr>
+          <p:cNvPr id="6" name="Rectangle 5"/>
+          <p:cNvSpPr/>
+          <p:nvPr/>
+        </p:nvSpPr>
+        <p:spPr>
+          <a:xfrm>
+            <a:off x="722376" y="1636776"/>
+            <a:ext cx="18288" cy="365760"/>
+          </a:xfrm>
+          <a:prstGeom prst="rect">
+            <a:avLst/>
+          </a:prstGeom>
+          <a:solidFill>
+            <a:srgbClr val="C9D4E0"/>
+          </a:solidFill>
+          <a:ln>
+            <a:noFill/>
+          </a:ln>
+        </p:spPr>
+        <p:style>
+          <a:lnRef idx="1">
+            <a:schemeClr val="accent1"/>
+          </a:lnRef>
+          <a:fillRef idx="3">
+            <a:schemeClr val="accent1"/>
+          </a:fillRef>
+          <a:effectRef idx="2">
+            <a:schemeClr val="accent1"/>
+          </a:effectRef>
+          <a:fontRef idx="minor">
+            <a:schemeClr val="lt1"/>
+          </a:fontRef>
+        </p:style>
+        <p:txBody>
+          <a:bodyPr rtlCol="0" anchor="ctr"/>
+          <a:lstStyle/>
+          <a:p>
+            <a:pPr algn="ctr"/>
+          </a:p>
+        </p:txBody>
+      </p:sp>
+      <p:sp>
+        <p:nvSpPr>
+          <p:cNvPr id="7" name="Oval 6"/>
+          <p:cNvSpPr/>
+          <p:nvPr/>
+        </p:nvSpPr>
+        <p:spPr>
+          <a:xfrm>
+            <a:off x="658368" y="2011679"/>
+            <a:ext cx="146304" cy="146304"/>
+          </a:xfrm>
+          <a:prstGeom prst="ellipse">
+            <a:avLst/>
+          </a:prstGeom>
+          <a:solidFill>
+            <a:srgbClr val="D4860B"/>
+          </a:solidFill>
+          <a:ln>
+            <a:noFill/>
+          </a:ln>
+        </p:spPr>
+        <p:style>
+          <a:lnRef idx="1">
+            <a:schemeClr val="accent1"/>
+          </a:lnRef>
+          <a:fillRef idx="3">
+            <a:schemeClr val="accent1"/>
+          </a:fillRef>
+          <a:effectRef idx="2">
+            <a:schemeClr val="accent1"/>
+          </a:effectRef>
+          <a:fontRef idx="minor">
+            <a:schemeClr val="lt1"/>
+          </a:fontRef>
+        </p:style>
+        <p:txBody>
+          <a:bodyPr rtlCol="0" anchor="ctr"/>
+          <a:lstStyle/>
+          <a:p>
+            <a:pPr algn="ctr"/>
+          </a:p>
+        </p:txBody>
+      </p:sp>
+      <p:sp>
+        <p:nvSpPr>
+          <p:cNvPr id="8" name="TextBox 7"/>
+          <p:cNvSpPr txBox="1"/>
+          <p:nvPr/>
+        </p:nvSpPr>
+        <p:spPr>
+          <a:xfrm>
+            <a:off x="960120" y="1965960"/>
+            <a:ext cx="10607040" cy="502920"/>
+          </a:xfrm>
+          <a:prstGeom prst="rect">
+            <a:avLst/>
+          </a:prstGeom>
+          <a:noFill/>
+        </p:spPr>
+        <p:txBody>
+          <a:bodyPr wrap="square" lIns="0" rIns="0" tIns="0" bIns="0">
+            <a:spAutoFit/>
+          </a:bodyPr>
+          <a:lstStyle/>
+          <a:p>
+            <a:r>
+              <a:rPr sz="1300" b="1">
+                <a:solidFill>
+                  <a:srgbClr val="D4860B"/>
+                </a:solidFill>
+                <a:latin typeface="Calibri"/>
+              </a:rPr>
+              <a:t>Aug 7, 2026   </a:t>
+            </a:r>
+            <a:r>
+              <a:rPr sz="1200" b="0">
+                <a:solidFill>
+                  <a:srgbClr val="1E293B"/>
+                </a:solidFill>
+                <a:latin typeface="Calibri"/>
+              </a:rPr>
+              <a:t>BOD 26-04: agency vulnerability-management policies must support risk-based remediation (four-variable model, 3-day tier to deferral)</a:t>
+            </a:r>
+          </a:p>
+        </p:txBody>
+      </p:sp>
+      <p:sp>
+        <p:nvSpPr>
+          <p:cNvPr id="9" name="Rectangle 8"/>
+          <p:cNvSpPr/>
+          <p:nvPr/>
+        </p:nvSpPr>
+        <p:spPr>
+          <a:xfrm>
+            <a:off x="722376" y="2185415"/>
+            <a:ext cx="18288" cy="365760"/>
+          </a:xfrm>
+          <a:prstGeom prst="rect">
+            <a:avLst/>
+          </a:prstGeom>
+          <a:solidFill>
+            <a:srgbClr val="C9D4E0"/>
+          </a:solidFill>
+          <a:ln>
+            <a:noFill/>
+          </a:ln>
+        </p:spPr>
+        <p:style>
+          <a:lnRef idx="1">
+            <a:schemeClr val="accent1"/>
+          </a:lnRef>
+          <a:fillRef idx="3">
+            <a:schemeClr val="accent1"/>
+          </a:fillRef>
+          <a:effectRef idx="2">
+            <a:schemeClr val="accent1"/>
+          </a:effectRef>
+          <a:fontRef idx="minor">
+            <a:schemeClr val="lt1"/>
+          </a:fontRef>
+        </p:style>
+        <p:txBody>
+          <a:bodyPr rtlCol="0" anchor="ctr"/>
+          <a:lstStyle/>
+          <a:p>
+            <a:pPr algn="ctr"/>
+          </a:p>
+        </p:txBody>
+      </p:sp>
+      <p:sp>
+        <p:nvSpPr>
+          <p:cNvPr id="10" name="Oval 9"/>
+          <p:cNvSpPr/>
+          <p:nvPr/>
+        </p:nvSpPr>
+        <p:spPr>
+          <a:xfrm>
+            <a:off x="658368" y="2560320"/>
+            <a:ext cx="146304" cy="146304"/>
+          </a:xfrm>
+          <a:prstGeom prst="ellipse">
+            <a:avLst/>
+          </a:prstGeom>
+          <a:solidFill>
+            <a:srgbClr val="C0392B"/>
+          </a:solidFill>
+          <a:ln>
+            <a:noFill/>
+          </a:ln>
+        </p:spPr>
+        <p:style>
+          <a:lnRef idx="1">
+            <a:schemeClr val="accent1"/>
+          </a:lnRef>
+          <a:fillRef idx="3">
+            <a:schemeClr val="accent1"/>
+          </a:fillRef>
+          <a:effectRef idx="2">
+            <a:schemeClr val="accent1"/>
+          </a:effectRef>
+          <a:fontRef idx="minor">
+            <a:schemeClr val="lt1"/>
+          </a:fontRef>
+        </p:style>
+        <p:txBody>
+          <a:bodyPr rtlCol="0" anchor="ctr"/>
+          <a:lstStyle/>
+          <a:p>
+            <a:pPr algn="ctr"/>
+          </a:p>
+        </p:txBody>
+      </p:sp>
+      <p:sp>
+        <p:nvSpPr>
+          <p:cNvPr id="11" name="TextBox 10"/>
+          <p:cNvSpPr txBox="1"/>
+          <p:nvPr/>
+        </p:nvSpPr>
+        <p:spPr>
+          <a:xfrm>
+            <a:off x="960120" y="2514600"/>
+            <a:ext cx="10607040" cy="502920"/>
+          </a:xfrm>
+          <a:prstGeom prst="rect">
+            <a:avLst/>
+          </a:prstGeom>
+          <a:noFill/>
+        </p:spPr>
+        <p:txBody>
+          <a:bodyPr wrap="square" lIns="0" rIns="0" tIns="0" bIns="0">
+            <a:spAutoFit/>
+          </a:bodyPr>
+          <a:lstStyle/>
+          <a:p>
+            <a:r>
+              <a:rPr sz="1300" b="1">
+                <a:solidFill>
+                  <a:srgbClr val="C0392B"/>
+                </a:solidFill>
+                <a:latin typeface="Calibri"/>
+              </a:rPr>
+              <a:t>Sep 21, 2026   </a:t>
+            </a:r>
+            <a:r>
+              <a:rPr sz="1200" b="0">
+                <a:solidFill>
+                  <a:srgbClr val="1E293B"/>
+                </a:solidFill>
+                <a:latin typeface="Calibri"/>
+              </a:rPr>
+              <a:t>FIPS 140-2 certificates move to NIST's Historical List — verify cryptographic modules are FIPS 140-3 tracked (SC-13)</a:t>
+            </a:r>
+          </a:p>
+        </p:txBody>
+      </p:sp>
+      <p:sp>
+        <p:nvSpPr>
+          <p:cNvPr id="12" name="Rectangle 11"/>
+          <p:cNvSpPr/>
+          <p:nvPr/>
+        </p:nvSpPr>
+        <p:spPr>
+          <a:xfrm>
+            <a:off x="722376" y="2734056"/>
+            <a:ext cx="18288" cy="365760"/>
+          </a:xfrm>
+          <a:prstGeom prst="rect">
+            <a:avLst/>
+          </a:prstGeom>
+          <a:solidFill>
+            <a:srgbClr val="C9D4E0"/>
+          </a:solidFill>
+          <a:ln>
+            <a:noFill/>
+          </a:ln>
+        </p:spPr>
+        <p:style>
+          <a:lnRef idx="1">
+            <a:schemeClr val="accent1"/>
+          </a:lnRef>
+          <a:fillRef idx="3">
+            <a:schemeClr val="accent1"/>
+          </a:fillRef>
+          <a:effectRef idx="2">
+            <a:schemeClr val="accent1"/>
+          </a:effectRef>
+          <a:fontRef idx="minor">
+            <a:schemeClr val="lt1"/>
+          </a:fontRef>
+        </p:style>
+        <p:txBody>
+          <a:bodyPr rtlCol="0" anchor="ctr"/>
+          <a:lstStyle/>
+          <a:p>
+            <a:pPr algn="ctr"/>
+          </a:p>
+        </p:txBody>
+      </p:sp>
+      <p:sp>
+        <p:nvSpPr>
+          <p:cNvPr id="13" name="Oval 12"/>
+          <p:cNvSpPr/>
+          <p:nvPr/>
+        </p:nvSpPr>
+        <p:spPr>
+          <a:xfrm>
+            <a:off x="658368" y="3108959"/>
+            <a:ext cx="146304" cy="146304"/>
+          </a:xfrm>
+          <a:prstGeom prst="ellipse">
+            <a:avLst/>
+          </a:prstGeom>
+          <a:solidFill>
+            <a:srgbClr val="C0392B"/>
+          </a:solidFill>
+          <a:ln>
+            <a:noFill/>
+          </a:ln>
+        </p:spPr>
+        <p:style>
+          <a:lnRef idx="1">
+            <a:schemeClr val="accent1"/>
+          </a:lnRef>
+          <a:fillRef idx="3">
+            <a:schemeClr val="accent1"/>
+          </a:fillRef>
+          <a:effectRef idx="2">
+            <a:schemeClr val="accent1"/>
+          </a:effectRef>
+          <a:fontRef idx="minor">
+            <a:schemeClr val="lt1"/>
+          </a:fontRef>
+        </p:style>
+        <p:txBody>
+          <a:bodyPr rtlCol="0" anchor="ctr"/>
+          <a:lstStyle/>
+          <a:p>
+            <a:pPr algn="ctr"/>
+          </a:p>
+        </p:txBody>
+      </p:sp>
+      <p:sp>
+        <p:nvSpPr>
+          <p:cNvPr id="14" name="TextBox 13"/>
+          <p:cNvSpPr txBox="1"/>
+          <p:nvPr/>
+        </p:nvSpPr>
+        <p:spPr>
+          <a:xfrm>
+            <a:off x="960120" y="3063239"/>
+            <a:ext cx="10607040" cy="502920"/>
+          </a:xfrm>
+          <a:prstGeom prst="rect">
+            <a:avLst/>
+          </a:prstGeom>
+          <a:noFill/>
+        </p:spPr>
+        <p:txBody>
+          <a:bodyPr wrap="square" lIns="0" rIns="0" tIns="0" bIns="0">
+            <a:spAutoFit/>
+          </a:bodyPr>
+          <a:lstStyle/>
+          <a:p>
+            <a:r>
+              <a:rPr sz="1300" b="1">
+                <a:solidFill>
+                  <a:srgbClr val="C0392B"/>
+                </a:solidFill>
+                <a:latin typeface="Calibri"/>
+              </a:rPr>
+              <a:t>Dec 7, 2026   </a:t>
+            </a:r>
+            <a:r>
+              <a:rPr sz="1200" b="0">
+                <a:solidFill>
+                  <a:srgbClr val="1E293B"/>
+                </a:solidFill>
+                <a:latin typeface="Calibri"/>
+              </a:rPr>
+              <a:t>BOD 26-04 remediation timelines in force + FedRAMP VDR/VER mandatory — SBOM and vendor disclosure required</a:t>
+            </a:r>
+          </a:p>
+        </p:txBody>
+      </p:sp>
+      <p:sp>
+        <p:nvSpPr>
+          <p:cNvPr id="15" name="Rectangle 14"/>
+          <p:cNvSpPr/>
+          <p:nvPr/>
+        </p:nvSpPr>
+        <p:spPr>
+          <a:xfrm>
+            <a:off x="722376" y="3282696"/>
+            <a:ext cx="18288" cy="365760"/>
+          </a:xfrm>
+          <a:prstGeom prst="rect">
+            <a:avLst/>
+          </a:prstGeom>
+          <a:solidFill>
+            <a:srgbClr val="C9D4E0"/>
+          </a:solidFill>
+          <a:ln>
+            <a:noFill/>
+          </a:ln>
+        </p:spPr>
+        <p:style>
+          <a:lnRef idx="1">
+            <a:schemeClr val="accent1"/>
+          </a:lnRef>
+          <a:fillRef idx="3">
+            <a:schemeClr val="accent1"/>
+          </a:fillRef>
+          <a:effectRef idx="2">
+            <a:schemeClr val="accent1"/>
+          </a:effectRef>
+          <a:fontRef idx="minor">
+            <a:schemeClr val="lt1"/>
+          </a:fontRef>
+        </p:style>
+        <p:txBody>
+          <a:bodyPr rtlCol="0" anchor="ctr"/>
+          <a:lstStyle/>
+          <a:p>
+            <a:pPr algn="ctr"/>
+          </a:p>
+        </p:txBody>
+      </p:sp>
+      <p:sp>
+        <p:nvSpPr>
+          <p:cNvPr id="16" name="Oval 15"/>
+          <p:cNvSpPr/>
+          <p:nvPr/>
+        </p:nvSpPr>
+        <p:spPr>
+          <a:xfrm>
+            <a:off x="658368" y="3657600"/>
+            <a:ext cx="146304" cy="146304"/>
+          </a:xfrm>
+          <a:prstGeom prst="ellipse">
+            <a:avLst/>
+          </a:prstGeom>
+          <a:solidFill>
+            <a:srgbClr val="1F3A5F"/>
+          </a:solidFill>
+          <a:ln>
+            <a:noFill/>
+          </a:ln>
+        </p:spPr>
+        <p:style>
+          <a:lnRef idx="1">
+            <a:schemeClr val="accent1"/>
+          </a:lnRef>
+          <a:fillRef idx="3">
+            <a:schemeClr val="accent1"/>
+          </a:fillRef>
+          <a:effectRef idx="2">
+            <a:schemeClr val="accent1"/>
+          </a:effectRef>
+          <a:fontRef idx="minor">
+            <a:schemeClr val="lt1"/>
+          </a:fontRef>
+        </p:style>
+        <p:txBody>
+          <a:bodyPr rtlCol="0" anchor="ctr"/>
+          <a:lstStyle/>
+          <a:p>
+            <a:pPr algn="ctr"/>
+          </a:p>
+        </p:txBody>
+      </p:sp>
+      <p:sp>
+        <p:nvSpPr>
+          <p:cNvPr id="17" name="TextBox 16"/>
+          <p:cNvSpPr txBox="1"/>
+          <p:nvPr/>
+        </p:nvSpPr>
+        <p:spPr>
+          <a:xfrm>
+            <a:off x="960120" y="3611880"/>
+            <a:ext cx="10607040" cy="502920"/>
+          </a:xfrm>
+          <a:prstGeom prst="rect">
+            <a:avLst/>
+          </a:prstGeom>
+          <a:noFill/>
+        </p:spPr>
+        <p:txBody>
+          <a:bodyPr wrap="square" lIns="0" rIns="0" tIns="0" bIns="0">
+            <a:spAutoFit/>
+          </a:bodyPr>
+          <a:lstStyle/>
+          <a:p>
+            <a:r>
+              <a:rPr sz="1300" b="1">
+                <a:solidFill>
+                  <a:srgbClr val="1F3A5F"/>
+                </a:solidFill>
+                <a:latin typeface="Calibri"/>
+              </a:rPr>
+              <a:t>Jan 1, 2027   </a:t>
+            </a:r>
+            <a:r>
+              <a:rPr sz="1200" b="0">
+                <a:solidFill>
+                  <a:srgbClr val="1E293B"/>
+                </a:solidFill>
+                <a:latin typeface="Calibri"/>
+              </a:rPr>
+              <a:t>FedRAMP CR26 mandatory for all · CNSA 2.0 acquisition gate (NSS-scoped; civilian PQC trajectory follows via M-23-02)</a:t>
+            </a:r>
+          </a:p>
+        </p:txBody>
+      </p:sp>
+      <p:sp>
+        <p:nvSpPr>
+          <p:cNvPr id="18" name="Rectangle 17"/>
+          <p:cNvSpPr/>
+          <p:nvPr/>
+        </p:nvSpPr>
+        <p:spPr>
+          <a:xfrm>
+            <a:off x="722376" y="3831336"/>
+            <a:ext cx="18288" cy="365760"/>
+          </a:xfrm>
+          <a:prstGeom prst="rect">
+            <a:avLst/>
+          </a:prstGeom>
+          <a:solidFill>
+            <a:srgbClr val="C9D4E0"/>
+          </a:solidFill>
+          <a:ln>
+            <a:noFill/>
+          </a:ln>
+        </p:spPr>
+        <p:style>
+          <a:lnRef idx="1">
+            <a:schemeClr val="accent1"/>
+          </a:lnRef>
+          <a:fillRef idx="3">
+            <a:schemeClr val="accent1"/>
+          </a:fillRef>
+          <a:effectRef idx="2">
+            <a:schemeClr val="accent1"/>
+          </a:effectRef>
+          <a:fontRef idx="minor">
+            <a:schemeClr val="lt1"/>
+          </a:fontRef>
+        </p:style>
+        <p:txBody>
+          <a:bodyPr rtlCol="0" anchor="ctr"/>
+          <a:lstStyle/>
+          <a:p>
+            <a:pPr algn="ctr"/>
+          </a:p>
+        </p:txBody>
+      </p:sp>
+      <p:sp>
+        <p:nvSpPr>
+          <p:cNvPr id="19" name="Oval 18"/>
+          <p:cNvSpPr/>
+          <p:nvPr/>
+        </p:nvSpPr>
+        <p:spPr>
+          <a:xfrm>
+            <a:off x="658368" y="4206240"/>
+            <a:ext cx="146304" cy="146304"/>
+          </a:xfrm>
+          <a:prstGeom prst="ellipse">
+            <a:avLst/>
+          </a:prstGeom>
+          <a:solidFill>
+            <a:srgbClr val="1F3A5F"/>
+          </a:solidFill>
+          <a:ln>
+            <a:noFill/>
+          </a:ln>
+        </p:spPr>
+        <p:style>
+          <a:lnRef idx="1">
+            <a:schemeClr val="accent1"/>
+          </a:lnRef>
+          <a:fillRef idx="3">
+            <a:schemeClr val="accent1"/>
+          </a:fillRef>
+          <a:effectRef idx="2">
+            <a:schemeClr val="accent1"/>
+          </a:effectRef>
+          <a:fontRef idx="minor">
+            <a:schemeClr val="lt1"/>
+          </a:fontRef>
+        </p:style>
+        <p:txBody>
+          <a:bodyPr rtlCol="0" anchor="ctr"/>
+          <a:lstStyle/>
+          <a:p>
+            <a:pPr algn="ctr"/>
+          </a:p>
+        </p:txBody>
+      </p:sp>
+      <p:sp>
+        <p:nvSpPr>
+          <p:cNvPr id="20" name="TextBox 19"/>
+          <p:cNvSpPr txBox="1"/>
+          <p:nvPr/>
+        </p:nvSpPr>
+        <p:spPr>
+          <a:xfrm>
+            <a:off x="960120" y="4160520"/>
+            <a:ext cx="10607040" cy="502920"/>
+          </a:xfrm>
+          <a:prstGeom prst="rect">
+            <a:avLst/>
+          </a:prstGeom>
+          <a:noFill/>
+        </p:spPr>
+        <p:txBody>
+          <a:bodyPr wrap="square" lIns="0" rIns="0" tIns="0" bIns="0">
+            <a:spAutoFit/>
+          </a:bodyPr>
+          <a:lstStyle/>
+          <a:p>
+            <a:r>
+              <a:rPr sz="1300" b="1">
+                <a:solidFill>
+                  <a:srgbClr val="1F3A5F"/>
+                </a:solidFill>
+                <a:latin typeface="Calibri"/>
+              </a:rPr>
+              <a:t>Jun 11, 2027   </a:t>
+            </a:r>
+            <a:r>
+              <a:rPr sz="1200" b="0">
+                <a:solidFill>
+                  <a:srgbClr val="1E293B"/>
+                </a:solidFill>
+                <a:latin typeface="Calibri"/>
+              </a:rPr>
+              <a:t>No new Rev5 certifications accepted</a:t>
+            </a:r>
+          </a:p>
+        </p:txBody>
+      </p:sp>
+      <p:sp>
+        <p:nvSpPr>
+          <p:cNvPr id="21" name="Rectangle 20"/>
+          <p:cNvSpPr/>
+          <p:nvPr/>
+        </p:nvSpPr>
+        <p:spPr>
+          <a:xfrm>
+            <a:off x="722376" y="4379976"/>
+            <a:ext cx="18288" cy="365760"/>
+          </a:xfrm>
+          <a:prstGeom prst="rect">
+            <a:avLst/>
+          </a:prstGeom>
+          <a:solidFill>
+            <a:srgbClr val="C9D4E0"/>
+          </a:solidFill>
+          <a:ln>
+            <a:noFill/>
+          </a:ln>
+        </p:spPr>
+        <p:style>
+          <a:lnRef idx="1">
+            <a:schemeClr val="accent1"/>
+          </a:lnRef>
+          <a:fillRef idx="3">
+            <a:schemeClr val="accent1"/>
+          </a:fillRef>
+          <a:effectRef idx="2">
+            <a:schemeClr val="accent1"/>
+          </a:effectRef>
+          <a:fontRef idx="minor">
+            <a:schemeClr val="lt1"/>
+          </a:fontRef>
+        </p:style>
+        <p:txBody>
+          <a:bodyPr rtlCol="0" anchor="ctr"/>
+          <a:lstStyle/>
+          <a:p>
+            <a:pPr algn="ctr"/>
+          </a:p>
+        </p:txBody>
+      </p:sp>
+      <p:sp>
+        <p:nvSpPr>
+          <p:cNvPr id="22" name="Oval 21"/>
+          <p:cNvSpPr/>
+          <p:nvPr/>
+        </p:nvSpPr>
+        <p:spPr>
+          <a:xfrm>
+            <a:off x="658368" y="4754879"/>
+            <a:ext cx="146304" cy="146304"/>
+          </a:xfrm>
+          <a:prstGeom prst="ellipse">
+            <a:avLst/>
+          </a:prstGeom>
+          <a:solidFill>
+            <a:srgbClr val="D4860B"/>
+          </a:solidFill>
+          <a:ln>
+            <a:noFill/>
+          </a:ln>
+        </p:spPr>
+        <p:style>
+          <a:lnRef idx="1">
+            <a:schemeClr val="accent1"/>
+          </a:lnRef>
+          <a:fillRef idx="3">
+            <a:schemeClr val="accent1"/>
+          </a:fillRef>
+          <a:effectRef idx="2">
+            <a:schemeClr val="accent1"/>
+          </a:effectRef>
+          <a:fontRef idx="minor">
+            <a:schemeClr val="lt1"/>
+          </a:fontRef>
+        </p:style>
+        <p:txBody>
+          <a:bodyPr rtlCol="0" anchor="ctr"/>
+          <a:lstStyle/>
+          <a:p>
+            <a:pPr algn="ctr"/>
+          </a:p>
+        </p:txBody>
+      </p:sp>
+      <p:sp>
+        <p:nvSpPr>
+          <p:cNvPr id="23" name="TextBox 22"/>
+          <p:cNvSpPr txBox="1"/>
+          <p:nvPr/>
+        </p:nvSpPr>
+        <p:spPr>
+          <a:xfrm>
+            <a:off x="960120" y="4709159"/>
+            <a:ext cx="10607040" cy="502920"/>
+          </a:xfrm>
+          <a:prstGeom prst="rect">
+            <a:avLst/>
+          </a:prstGeom>
+          <a:noFill/>
+        </p:spPr>
+        <p:txBody>
+          <a:bodyPr wrap="square" lIns="0" rIns="0" tIns="0" bIns="0">
+            <a:spAutoFit/>
+          </a:bodyPr>
+          <a:lstStyle/>
+          <a:p>
+            <a:r>
+              <a:rPr sz="1300" b="1">
+                <a:solidFill>
+                  <a:srgbClr val="D4860B"/>
+                </a:solidFill>
+                <a:latin typeface="Calibri"/>
+              </a:rPr>
+              <a:t>~Aug 2027   </a:t>
+            </a:r>
+            <a:r>
+              <a:rPr sz="1200" b="0">
+                <a:solidFill>
+                  <a:srgbClr val="1E293B"/>
+                </a:solidFill>
+                <a:latin typeface="Calibri"/>
+              </a:rPr>
+              <a:t>Next scheduled NIST 800-53 release — Release 5.2.0 (Aug 2025) already added SA-15(13), SA-24, SI-2(7), unmapped in Parts 11/15</a:t>
+            </a:r>
+          </a:p>
+        </p:txBody>
+      </p:sp>
+      <p:sp>
+        <p:nvSpPr>
+          <p:cNvPr id="24" name="Rectangle 23"/>
+          <p:cNvSpPr/>
+          <p:nvPr/>
+        </p:nvSpPr>
+        <p:spPr>
+          <a:xfrm>
+            <a:off x="722376" y="4928616"/>
+            <a:ext cx="18288" cy="365760"/>
+          </a:xfrm>
+          <a:prstGeom prst="rect">
+            <a:avLst/>
+          </a:prstGeom>
+          <a:solidFill>
+            <a:srgbClr val="C9D4E0"/>
+          </a:solidFill>
+          <a:ln>
+            <a:noFill/>
+          </a:ln>
+        </p:spPr>
+        <p:style>
+          <a:lnRef idx="1">
+            <a:schemeClr val="accent1"/>
+          </a:lnRef>
+          <a:fillRef idx="3">
+            <a:schemeClr val="accent1"/>
+          </a:fillRef>
+          <a:effectRef idx="2">
+            <a:schemeClr val="accent1"/>
+          </a:effectRef>
+          <a:fontRef idx="minor">
+            <a:schemeClr val="lt1"/>
+          </a:fontRef>
+        </p:style>
+        <p:txBody>
+          <a:bodyPr rtlCol="0" anchor="ctr"/>
+          <a:lstStyle/>
+          <a:p>
+            <a:pPr algn="ctr"/>
+          </a:p>
+        </p:txBody>
+      </p:sp>
+      <p:sp>
+        <p:nvSpPr>
+          <p:cNvPr id="25" name="Oval 24"/>
+          <p:cNvSpPr/>
+          <p:nvPr/>
+        </p:nvSpPr>
+        <p:spPr>
+          <a:xfrm>
+            <a:off x="658368" y="5303520"/>
+            <a:ext cx="146304" cy="146304"/>
+          </a:xfrm>
+          <a:prstGeom prst="ellipse">
+            <a:avLst/>
+          </a:prstGeom>
+          <a:solidFill>
+            <a:srgbClr val="6B7A8D"/>
+          </a:solidFill>
+          <a:ln>
+            <a:noFill/>
+          </a:ln>
+        </p:spPr>
+        <p:style>
+          <a:lnRef idx="1">
+            <a:schemeClr val="accent1"/>
+          </a:lnRef>
+          <a:fillRef idx="3">
+            <a:schemeClr val="accent1"/>
+          </a:fillRef>
+          <a:effectRef idx="2">
+            <a:schemeClr val="accent1"/>
+          </a:effectRef>
+          <a:fontRef idx="minor">
+            <a:schemeClr val="lt1"/>
+          </a:fontRef>
+        </p:style>
+        <p:txBody>
+          <a:bodyPr rtlCol="0" anchor="ctr"/>
+          <a:lstStyle/>
+          <a:p>
+            <a:pPr algn="ctr"/>
+          </a:p>
+        </p:txBody>
+      </p:sp>
+      <p:sp>
+        <p:nvSpPr>
+          <p:cNvPr id="26" name="TextBox 25"/>
+          <p:cNvSpPr txBox="1"/>
+          <p:nvPr/>
+        </p:nvSpPr>
+        <p:spPr>
+          <a:xfrm>
+            <a:off x="960120" y="5257800"/>
+            <a:ext cx="10607040" cy="502920"/>
+          </a:xfrm>
+          <a:prstGeom prst="rect">
+            <a:avLst/>
+          </a:prstGeom>
+          <a:noFill/>
+        </p:spPr>
+        <p:txBody>
+          <a:bodyPr wrap="square" lIns="0" rIns="0" tIns="0" bIns="0">
+            <a:spAutoFit/>
+          </a:bodyPr>
+          <a:lstStyle/>
+          <a:p>
+            <a:r>
+              <a:rPr sz="1300" b="1">
+                <a:solidFill>
+                  <a:srgbClr val="6B7A8D"/>
+                </a:solidFill>
+                <a:latin typeface="Calibri"/>
+              </a:rPr>
+              <a:t>2030 / 2035   </a:t>
+            </a:r>
+            <a:r>
+              <a:rPr sz="1200" b="0">
+                <a:solidFill>
+                  <a:srgbClr val="1E293B"/>
+                </a:solidFill>
+                <a:latin typeface="Calibri"/>
+              </a:rPr>
+              <a:t>Quantum-vulnerable cryptography deprecated, then prohibited — M-23-02 crypto inventories run to the 2035 horizon</a:t>
+            </a:r>
+          </a:p>
+        </p:txBody>
+      </p:sp>
+      <p:sp>
+        <p:nvSpPr>
+          <p:cNvPr id="27" name="Rounded Rectangle 26"/>
+          <p:cNvSpPr/>
+          <p:nvPr/>
+        </p:nvSpPr>
+        <p:spPr>
+          <a:xfrm>
+            <a:off x="521207" y="5943600"/>
+            <a:ext cx="11155680" cy="457200"/>
+          </a:xfrm>
+          <a:prstGeom prst="roundRect">
+            <a:avLst/>
+          </a:prstGeom>
+          <a:solidFill>
+            <a:srgbClr val="EDF3F9"/>
+          </a:solidFill>
+          <a:ln w="9525">
+            <a:solidFill>
+              <a:srgbClr val="C9D4E0"/>
+            </a:solidFill>
+          </a:ln>
+        </p:spPr>
+        <p:style>
+          <a:lnRef idx="1">
+            <a:schemeClr val="accent1"/>
+          </a:lnRef>
+          <a:fillRef idx="3">
+            <a:schemeClr val="accent1"/>
+          </a:fillRef>
+          <a:effectRef idx="2">
+            <a:schemeClr val="accent1"/>
+          </a:effectRef>
+          <a:fontRef idx="minor">
+            <a:schemeClr val="lt1"/>
+          </a:fontRef>
+        </p:style>
+        <p:txBody>
+          <a:bodyPr rtlCol="0" anchor="ctr"/>
+          <a:lstStyle/>
+          <a:p>
+            <a:pPr algn="ctr"/>
+          </a:p>
+        </p:txBody>
+      </p:sp>
+      <p:sp>
+        <p:nvSpPr>
+          <p:cNvPr id="28" name="TextBox 27"/>
+          <p:cNvSpPr txBox="1"/>
+          <p:nvPr/>
+        </p:nvSpPr>
+        <p:spPr>
+          <a:xfrm>
+            <a:off x="749808" y="6035040"/>
+            <a:ext cx="10698480" cy="292608"/>
+          </a:xfrm>
+          <a:prstGeom prst="rect">
+            <a:avLst/>
+          </a:prstGeom>
+          <a:noFill/>
+        </p:spPr>
+        <p:txBody>
+          <a:bodyPr wrap="square" lIns="0" rIns="0" tIns="0" bIns="0">
+            <a:spAutoFit/>
+          </a:bodyPr>
+          <a:lstStyle/>
+          <a:p>
+            <a:r>
+              <a:rPr sz="1100" b="1">
+                <a:solidFill>
+                  <a:srgbClr val="1F3A5F"/>
+                </a:solidFill>
+                <a:latin typeface="Calibri"/>
+              </a:rPr>
+              <a:t>Already in force: </a:t>
+            </a:r>
+            <a:r>
+              <a:rPr sz="1100" b="0">
+                <a:solidFill>
+                  <a:srgbClr val="1E293B"/>
+                </a:solidFill>
+                <a:latin typeface="Calibri"/>
+              </a:rPr>
+              <a:t>M-21-31 logging (EL3 Aug 2023) · M-21-07 IPv6 (80% FY2025) · M-22-09 Zero Trust (FY2024 goals; continued by M-24-14 / M-25-04) · BOD 25-01 SCuBA (policies Jun 20, 2025).</a:t>
+            </a:r>
+          </a:p>
+        </p:txBody>
+      </p:sp>
+      <p:sp>
+        <p:nvSpPr>
+          <p:cNvPr id="29" name="TextBox 28"/>
+          <p:cNvSpPr txBox="1"/>
+          <p:nvPr/>
+        </p:nvSpPr>
+        <p:spPr>
+          <a:xfrm>
+            <a:off x="521207" y="6528816"/>
+            <a:ext cx="9601200" cy="228600"/>
+          </a:xfrm>
+          <a:prstGeom prst="rect">
+            <a:avLst/>
+          </a:prstGeom>
+          <a:noFill/>
+        </p:spPr>
+        <p:txBody>
+          <a:bodyPr wrap="square" lIns="0" rIns="0" tIns="0" bIns="0">
+            <a:spAutoFit/>
+          </a:bodyPr>
+          <a:lstStyle/>
+          <a:p>
+            <a:r>
+              <a:rPr sz="900" b="0">
+                <a:solidFill>
+                  <a:srgbClr val="6B7A8D"/>
+                </a:solidFill>
+                <a:latin typeface="Calibri"/>
+              </a:rPr>
+              <a:t>Federal AAN — Executive Summary  ·  CSI Team Draft — Internal, Not for Public Distribution  ·  Date Code 2026-07-07 11:59 ET</a:t>
+            </a:r>
+          </a:p>
+        </p:txBody>
+      </p:sp>
+      <p:sp>
+        <p:nvSpPr>
+          <p:cNvPr id="30" name="TextBox 29"/>
+          <p:cNvSpPr txBox="1"/>
+          <p:nvPr/>
+        </p:nvSpPr>
+        <p:spPr>
+          <a:xfrm>
+            <a:off x="11247120" y="6528816"/>
+            <a:ext cx="411480" cy="228600"/>
+          </a:xfrm>
+          <a:prstGeom prst="rect">
+            <a:avLst/>
+          </a:prstGeom>
+          <a:noFill/>
+        </p:spPr>
+        <p:txBody>
+          <a:bodyPr wrap="square" lIns="0" rIns="0" tIns="0" bIns="0">
+            <a:spAutoFit/>
+          </a:bodyPr>
+          <a:lstStyle/>
+          <a:p>
+            <a:r>
+              <a:rPr sz="900" b="0">
+                <a:solidFill>
+                  <a:srgbClr val="6B7A8D"/>
+                </a:solidFill>
+                <a:latin typeface="Calibri"/>
+              </a:rPr>
+              <a:t>22</a:t>
+            </a:r>
           </a:p>
         </p:txBody>
       </p:sp>
@@ -8552,7 +9860,7 @@
                 <a:ea typeface="Calibri" pitchFamily="34" charset="-122"/>
                 <a:cs typeface="Calibri" pitchFamily="34" charset="-120"/>
               </a:rPr>
-              <a:t>Federal AAN — Executive Summary  ·  CSI Team Draft — Internal, Not for Public Distribution  ·  Date Code 2026-07-07 09:58 ET</a:t>
+              <a:t>Federal AAN — Executive Summary  ·  CSI Team Draft — Internal, Not for Public Distribution  ·  Date Code 2026-07-07 11:59 ET</a:t>
             </a:r>
             <a:endParaRPr lang="en-US" sz="900" dirty="0"/>
           </a:p>
@@ -8764,7 +10072,7 @@
                 <a:ea typeface="Calibri" pitchFamily="34" charset="-122"/>
                 <a:cs typeface="Calibri" pitchFamily="34" charset="-120"/>
               </a:rPr>
-              <a:t>Federal AAN — Executive Summary  ·  CSI Team Draft — Internal, Not for Public Distribution  ·  Date Code 2026-07-07 09:58 ET</a:t>
+              <a:t>Federal AAN — Executive Summary  ·  CSI Team Draft — Internal, Not for Public Distribution  ·  Date Code 2026-07-07 11:59 ET</a:t>
             </a:r>
             <a:endParaRPr lang="en-US" sz="900" dirty="0"/>
           </a:p>
@@ -8976,7 +10284,7 @@
                 <a:ea typeface="Calibri" pitchFamily="34" charset="-122"/>
                 <a:cs typeface="Calibri" pitchFamily="34" charset="-120"/>
               </a:rPr>
-              <a:t>Federal AAN — Executive Summary  ·  CSI Team Draft — Internal, Not for Public Distribution  ·  Date Code 2026-07-07 09:58 ET</a:t>
+              <a:t>Federal AAN — Executive Summary  ·  CSI Team Draft — Internal, Not for Public Distribution  ·  Date Code 2026-07-07 11:59 ET</a:t>
             </a:r>
             <a:endParaRPr lang="en-US" sz="900" dirty="0"/>
           </a:p>
@@ -9241,7 +10549,7 @@
                 <a:ea typeface="Calibri" pitchFamily="34" charset="-122"/>
                 <a:cs typeface="Calibri" pitchFamily="34" charset="-120"/>
               </a:rPr>
-              <a:t>Federal AAN — Executive Summary  ·  CSI Team Draft — Internal, Not for Public Distribution  ·  Date Code 2026-07-07 09:58 ET</a:t>
+              <a:t>Federal AAN — Executive Summary  ·  CSI Team Draft — Internal, Not for Public Distribution  ·  Date Code 2026-07-07 11:59 ET</a:t>
             </a:r>
             <a:endParaRPr lang="en-US" sz="900" dirty="0"/>
           </a:p>
@@ -9453,7 +10761,7 @@
                 <a:ea typeface="Calibri" pitchFamily="34" charset="-122"/>
                 <a:cs typeface="Calibri" pitchFamily="34" charset="-120"/>
               </a:rPr>
-              <a:t>Federal AAN — Executive Summary  ·  CSI Team Draft — Internal, Not for Public Distribution  ·  Date Code 2026-07-07 09:58 ET</a:t>
+              <a:t>Federal AAN — Executive Summary  ·  CSI Team Draft — Internal, Not for Public Distribution  ·  Date Code 2026-07-07 11:59 ET</a:t>
             </a:r>
             <a:endParaRPr lang="en-US" sz="900" dirty="0"/>
           </a:p>
@@ -9665,7 +10973,7 @@
                 <a:ea typeface="Calibri" pitchFamily="34" charset="-122"/>
                 <a:cs typeface="Calibri" pitchFamily="34" charset="-120"/>
               </a:rPr>
-              <a:t>Federal AAN — Executive Summary  ·  CSI Team Draft — Internal, Not for Public Distribution  ·  Date Code 2026-07-07 09:58 ET</a:t>
+              <a:t>Federal AAN — Executive Summary  ·  CSI Team Draft — Internal, Not for Public Distribution  ·  Date Code 2026-07-07 11:59 ET</a:t>
             </a:r>
             <a:endParaRPr lang="en-US" sz="900" dirty="0"/>
           </a:p>
@@ -9877,7 +11185,7 @@
                 <a:ea typeface="Calibri" pitchFamily="34" charset="-122"/>
                 <a:cs typeface="Calibri" pitchFamily="34" charset="-120"/>
               </a:rPr>
-              <a:t>Federal AAN — Executive Summary  ·  CSI Team Draft — Internal, Not for Public Distribution  ·  Date Code 2026-07-07 09:58 ET</a:t>
+              <a:t>Federal AAN — Executive Summary  ·  CSI Team Draft — Internal, Not for Public Distribution  ·  Date Code 2026-07-07 11:59 ET</a:t>
             </a:r>
             <a:endParaRPr lang="en-US" sz="900" dirty="0"/>
           </a:p>

--- a/inbox/Application Aware Networking/Book_00_FedAAN_Executive_Summary.pptx
+++ b/inbox/Application Aware Networking/Book_00_FedAAN_Executive_Summary.pptx
@@ -2354,19 +2354,43 @@
           <a:lstStyle/>
           <a:p>
             <a:r>
-              <a:rPr lang="en-US" dirty="0"/>
-              <a:t>THE CLOSURE NECESSITY DOCTRINE — the claim is stronger than "recommended" and it is falsifiable: for a specific, enumerable set of NIST SP 800-53 Rev 5 controls, three technologies are the ONLY closure mechanisms. Every "required" in the series pairs with the control text, physics, or protocol behavior that makes the alternatives impossible — never with an adjective.
-1. IPAM/DDI (authoritative naming-and-addressing plane). Controls with no alternate closure path: SC-20, SC-20(1), SC-21, SC-22 (authoritative/recursive DNS); CM-8, CM-8(1) (component inventory); IA-9 (service identification). Why: you cannot attest authoritative name resolution without an authoritative resolver, and you cannot inventory what you cannot enumerate. No scanner creates a source of truth — a scanner can only measure drift from one.
-2. SD-WAN (encrypted, application-aware transport overlay). Controls: SC-8, SC-8(1) on DIA circuits (network-layer encryption); SC-5 (traffic-class separation); SI-4 (application-layer telemetry on transport). Why: a pipe has no encryption, no path intelligence, and no telemetry. Physics gives DIA lower latency; only the overlay gives it a control surface. There is no second way to encrypt a DIA circuit at the network layer.
-3. TIC 3.0 (distributed policy enforcement for the pipes). Controls: SC-7, SC-7(7) (boundary protection on distributed egress); AC-4 (information flow enforcement outside the legacy TIC access point). Why: under TIC 3.0, DIA is permissible ONLY WHEN the security-capabilities catalog is satisfied at the distributed enforcement point — the SASE stack. An ungoverned DIA circuit is not a modernization; it is a finding.
-BASELINE CAVEAT: these closure claims are made against the NIST SP 800-53 Rev 5 baseline and FedRAMP 20x CR26 rules effective June 25, 2026. Changes to the baseline, new FedRAMP-authorized product entries, or revised assessment guidance may alter these closure paths. Validate with OIS and the agency's 3PAO before using these claims as the basis for authorization decisions.
-The KSI Closure Necessity Matrix (slide 10) quantifies this doctrine against all 29 FedRAMP 20x KSI rules.</a:t>
-            </a:r>
-            <a:endParaRPr lang="en-US" dirty="0"/>
+              <a:t>THE CLOSURE NECESSITY DOCTRINE — the claim is stronger than "recommended" and it is falsifiable: for a specific, enumerable set of NIST SP 800-53 Rev 5 controls, three technologies are the ONLY closure mechanisms. Every "required" in the series pairs with the control text, physics, or protocol behavior that makes the alternatives impossible — never with an adjective.</a:t>
+            </a:r>
+          </a:p>
+          <a:p>
+            <a:r>
+              <a:t>1. IPAM/DDI (authoritative naming-and-addressing plane). Controls with no alternate closure path: SC-20, SC-20(1), SC-21, SC-22 (authoritative/recursive DNS); CM-8, CM-8(1) (component inventory); IA-9 (service identification). Why: you cannot attest authoritative name resolution without an authoritative resolver, and you cannot inventory what you cannot enumerate. No scanner creates a source of truth — a scanner can only measure drift from one.</a:t>
+            </a:r>
+          </a:p>
+          <a:p>
+            <a:r>
+              <a:t>2. SD-WAN (encrypted, application-aware transport overlay). Controls: SC-8, SC-8(1) on DIA circuits (network-layer encryption); SC-5 (traffic-class separation); SI-4 (application-layer telemetry on transport). Why: a pipe has no encryption, no path intelligence, and no telemetry. Physics gives DIA lower latency; only the overlay gives it a control surface. There is no second way to encrypt a DIA circuit at the network layer.</a:t>
+            </a:r>
+          </a:p>
+          <a:p>
+            <a:r>
+              <a:t>3. TIC 3.0 (distributed policy enforcement for the pipes). Controls: SC-7, SC-7(7) (boundary protection on distributed egress); AC-4 (information flow enforcement outside the legacy TIC access point). Why: under TIC 3.0, DIA is permissible ONLY WHEN the security-capabilities catalog is satisfied at the distributed enforcement point — the SASE stack. An ungoverned DIA circuit is not a modernization; it is a finding.</a:t>
+            </a:r>
+          </a:p>
+          <a:p>
+            <a:r>
+              <a:t>BASELINE CAVEAT: these closure claims are made against the NIST SP 800-53 Rev 5 baseline and FedRAMP 20x CR26 rules effective June 25, 2026. Changes to the baseline, new FedRAMP-authorized product entries, or revised assessment guidance may alter these closure paths. Validate with OIS and the agency's 3PAO before using these claims as the basis for authorization decisions.</a:t>
+            </a:r>
+          </a:p>
+          <a:p>
+            <a:r>
+              <a:t>The KSI Closure Necessity Matrix (slide 10) quantifies this doctrine against all 29 FedRAMP 20x KSI rules.</a:t>
+            </a:r>
           </a:p>
           <a:p>
             <a:r>
               <a:t>Vendor sources: https://csrc.nist.gov/pubs/sp/800/53/r5/upd1/final | uiao repo: inbox/Application Aware Networking/Book_00_FedAAN_Executive_Summary.qmd</a:t>
+            </a:r>
+          </a:p>
+          <a:p/>
+          <a:p>
+            <a:r>
+              <a:t>MECHANISM, NOT PRODUCT (added 2026-07-07, SSA review response — mirrors the new Book 00 callout): 'no alternate closure path' is a claim about mechanism classes, never vendors. Every product named in the series is a deployed example of its mechanism, and FedRAMP-authorized alternatives exist at every layer — the alternatives matrix in the ConMon Gap Roadmap enumerates them (DDI, NAC/RADIUS, SD-WAN, SASE, IdP, HCM, SIEM, PAM, CLM, MDM). The program doctrine: multiple compliant paths exist before the agency chooses; exactly one exists after — the selected path becomes mandatory once chosen, because split implementations of a truth plane recreate the fragmented-truth problem the series exists to end. If a reviewer or leader reads the necessity table as vendor lock-in, this is the standing correction.</a:t>
             </a:r>
           </a:p>
         </p:txBody>
@@ -3102,7 +3126,7 @@
                 <a:ea typeface="Calibri" pitchFamily="34" charset="-122"/>
                 <a:cs typeface="Calibri" pitchFamily="34" charset="-120"/>
               </a:rPr>
-              <a:t>NIST SP 800-53 Rev 5  ·  FedRAMP 20x Consolidated Rules (June 25, 2026)  ·  Mandatory January 1, 2027  ·  Date Code 2026-07-07 11:59 ET</a:t>
+              <a:t>NIST SP 800-53 Rev 5  ·  FedRAMP 20x Consolidated Rules (June 25, 2026)  ·  Mandatory January 1, 2027  ·  Date Code 2026-07-07 15:28 ET</a:t>
             </a:r>
             <a:endParaRPr lang="en-US" sz="1200" dirty="0"/>
           </a:p>
@@ -3173,7 +3197,7 @@
                 <a:ea typeface="Calibri" pitchFamily="34" charset="-122"/>
                 <a:cs typeface="Calibri" pitchFamily="34" charset="-120"/>
               </a:rPr>
-              <a:t>Federal AAN — Executive Summary  ·  CSI Team Draft — Internal, Not for Public Distribution  ·  Date Code 2026-07-07 11:59 ET</a:t>
+              <a:t>Federal AAN — Executive Summary  ·  CSI Team Draft — Internal, Not for Public Distribution  ·  Date Code 2026-07-07 15:28 ET</a:t>
             </a:r>
             <a:endParaRPr lang="en-US" sz="900" dirty="0"/>
           </a:p>
@@ -3385,7 +3409,7 @@
                 <a:ea typeface="Calibri" pitchFamily="34" charset="-122"/>
                 <a:cs typeface="Calibri" pitchFamily="34" charset="-120"/>
               </a:rPr>
-              <a:t>Federal AAN — Executive Summary  ·  CSI Team Draft — Internal, Not for Public Distribution  ·  Date Code 2026-07-07 11:59 ET</a:t>
+              <a:t>Federal AAN — Executive Summary  ·  CSI Team Draft — Internal, Not for Public Distribution  ·  Date Code 2026-07-07 15:28 ET</a:t>
             </a:r>
             <a:endParaRPr lang="en-US" sz="900" dirty="0"/>
           </a:p>
@@ -3597,7 +3621,7 @@
                 <a:ea typeface="Calibri" pitchFamily="34" charset="-122"/>
                 <a:cs typeface="Calibri" pitchFamily="34" charset="-120"/>
               </a:rPr>
-              <a:t>Federal AAN — Executive Summary  ·  CSI Team Draft — Internal, Not for Public Distribution  ·  Date Code 2026-07-07 11:59 ET</a:t>
+              <a:t>Federal AAN — Executive Summary  ·  CSI Team Draft — Internal, Not for Public Distribution  ·  Date Code 2026-07-07 15:28 ET</a:t>
             </a:r>
             <a:endParaRPr lang="en-US" sz="900" dirty="0"/>
           </a:p>
@@ -3848,7 +3872,7 @@
                 <a:ea typeface="Calibri" pitchFamily="34" charset="-122"/>
                 <a:cs typeface="Calibri" pitchFamily="34" charset="-120"/>
               </a:rPr>
-              <a:t>Federal AAN — Executive Summary  ·  CSI Team Draft — Internal, Not for Public Distribution  ·  Date Code 2026-07-07 11:59 ET</a:t>
+              <a:t>Federal AAN — Executive Summary  ·  CSI Team Draft — Internal, Not for Public Distribution  ·  Date Code 2026-07-07 15:28 ET</a:t>
             </a:r>
             <a:endParaRPr lang="en-US" sz="900" dirty="0"/>
           </a:p>
@@ -4060,7 +4084,7 @@
                 <a:ea typeface="Calibri" pitchFamily="34" charset="-122"/>
                 <a:cs typeface="Calibri" pitchFamily="34" charset="-120"/>
               </a:rPr>
-              <a:t>Federal AAN — Executive Summary  ·  CSI Team Draft — Internal, Not for Public Distribution  ·  Date Code 2026-07-07 11:59 ET</a:t>
+              <a:t>Federal AAN — Executive Summary  ·  CSI Team Draft — Internal, Not for Public Distribution  ·  Date Code 2026-07-07 15:28 ET</a:t>
             </a:r>
             <a:endParaRPr lang="en-US" sz="900" dirty="0"/>
           </a:p>
@@ -4272,7 +4296,7 @@
                 <a:ea typeface="Calibri" pitchFamily="34" charset="-122"/>
                 <a:cs typeface="Calibri" pitchFamily="34" charset="-120"/>
               </a:rPr>
-              <a:t>Federal AAN — Executive Summary  ·  CSI Team Draft — Internal, Not for Public Distribution  ·  Date Code 2026-07-07 11:59 ET</a:t>
+              <a:t>Federal AAN — Executive Summary  ·  CSI Team Draft — Internal, Not for Public Distribution  ·  Date Code 2026-07-07 15:28 ET</a:t>
             </a:r>
             <a:endParaRPr lang="en-US" sz="900" dirty="0"/>
           </a:p>
@@ -4484,7 +4508,7 @@
                 <a:ea typeface="Calibri" pitchFamily="34" charset="-122"/>
                 <a:cs typeface="Calibri" pitchFamily="34" charset="-120"/>
               </a:rPr>
-              <a:t>Federal AAN — Executive Summary  ·  CSI Team Draft — Internal, Not for Public Distribution  ·  Date Code 2026-07-07 11:59 ET</a:t>
+              <a:t>Federal AAN — Executive Summary  ·  CSI Team Draft — Internal, Not for Public Distribution  ·  Date Code 2026-07-07 15:28 ET</a:t>
             </a:r>
             <a:endParaRPr lang="en-US" sz="900" dirty="0"/>
           </a:p>
@@ -4696,7 +4720,7 @@
                 <a:ea typeface="Calibri" pitchFamily="34" charset="-122"/>
                 <a:cs typeface="Calibri" pitchFamily="34" charset="-120"/>
               </a:rPr>
-              <a:t>Federal AAN — Executive Summary  ·  CSI Team Draft — Internal, Not for Public Distribution  ·  Date Code 2026-07-07 11:59 ET</a:t>
+              <a:t>Federal AAN — Executive Summary  ·  CSI Team Draft — Internal, Not for Public Distribution  ·  Date Code 2026-07-07 15:28 ET</a:t>
             </a:r>
             <a:endParaRPr lang="en-US" sz="900" dirty="0"/>
           </a:p>
@@ -4908,7 +4932,7 @@
                 <a:ea typeface="Calibri" pitchFamily="34" charset="-122"/>
                 <a:cs typeface="Calibri" pitchFamily="34" charset="-120"/>
               </a:rPr>
-              <a:t>Federal AAN — Executive Summary  ·  CSI Team Draft — Internal, Not for Public Distribution  ·  Date Code 2026-07-07 11:59 ET</a:t>
+              <a:t>Federal AAN — Executive Summary  ·  CSI Team Draft — Internal, Not for Public Distribution  ·  Date Code 2026-07-07 15:28 ET</a:t>
             </a:r>
             <a:endParaRPr lang="en-US" sz="900" dirty="0"/>
           </a:p>
@@ -5120,7 +5144,7 @@
                 <a:ea typeface="Calibri" pitchFamily="34" charset="-122"/>
                 <a:cs typeface="Calibri" pitchFamily="34" charset="-120"/>
               </a:rPr>
-              <a:t>Federal AAN — Executive Summary  ·  CSI Team Draft — Internal, Not for Public Distribution  ·  Date Code 2026-07-07 11:59 ET</a:t>
+              <a:t>Federal AAN — Executive Summary  ·  CSI Team Draft — Internal, Not for Public Distribution  ·  Date Code 2026-07-07 15:28 ET</a:t>
             </a:r>
             <a:endParaRPr lang="en-US" sz="900" dirty="0"/>
           </a:p>
@@ -7089,7 +7113,7 @@
                 <a:ea typeface="Calibri" pitchFamily="34" charset="-122"/>
                 <a:cs typeface="Calibri" pitchFamily="34" charset="-120"/>
               </a:rPr>
-              <a:t>Federal AAN — Executive Summary  ·  CSI Team Draft — Internal, Not for Public Distribution  ·  Date Code 2026-07-07 11:59 ET</a:t>
+              <a:t>Federal AAN — Executive Summary  ·  CSI Team Draft — Internal, Not for Public Distribution  ·  Date Code 2026-07-07 15:28 ET</a:t>
             </a:r>
             <a:endParaRPr lang="en-US" sz="900" dirty="0"/>
           </a:p>
@@ -8140,7 +8164,7 @@
                 <a:ea typeface="Calibri" pitchFamily="34" charset="-122"/>
                 <a:cs typeface="Calibri" pitchFamily="34" charset="-120"/>
               </a:rPr>
-              <a:t>Federal AAN — Executive Summary  ·  CSI Team Draft — Internal, Not for Public Distribution  ·  Date Code 2026-07-07 11:59 ET</a:t>
+              <a:t>Federal AAN — Executive Summary  ·  CSI Team Draft — Internal, Not for Public Distribution  ·  Date Code 2026-07-07 15:28 ET</a:t>
             </a:r>
             <a:endParaRPr lang="en-US" sz="900" dirty="0"/>
           </a:p>
@@ -8352,7 +8376,7 @@
                 <a:ea typeface="Calibri" pitchFamily="34" charset="-122"/>
                 <a:cs typeface="Calibri" pitchFamily="34" charset="-120"/>
               </a:rPr>
-              <a:t>Federal AAN — Executive Summary  ·  CSI Team Draft — Internal, Not for Public Distribution  ·  Date Code 2026-07-07 11:59 ET</a:t>
+              <a:t>Federal AAN — Executive Summary  ·  CSI Team Draft — Internal, Not for Public Distribution  ·  Date Code 2026-07-07 15:28 ET</a:t>
             </a:r>
             <a:endParaRPr lang="en-US" sz="900" dirty="0"/>
           </a:p>
@@ -9756,7 +9780,7 @@
                 </a:solidFill>
                 <a:latin typeface="Calibri"/>
               </a:rPr>
-              <a:t>Federal AAN — Executive Summary  ·  CSI Team Draft — Internal, Not for Public Distribution  ·  Date Code 2026-07-07 11:59 ET</a:t>
+              <a:t>Federal AAN — Executive Summary  ·  CSI Team Draft — Internal, Not for Public Distribution  ·  Date Code 2026-07-07 15:28 ET</a:t>
             </a:r>
           </a:p>
         </p:txBody>
@@ -9860,7 +9884,7 @@
                 <a:ea typeface="Calibri" pitchFamily="34" charset="-122"/>
                 <a:cs typeface="Calibri" pitchFamily="34" charset="-120"/>
               </a:rPr>
-              <a:t>Federal AAN — Executive Summary  ·  CSI Team Draft — Internal, Not for Public Distribution  ·  Date Code 2026-07-07 11:59 ET</a:t>
+              <a:t>Federal AAN — Executive Summary  ·  CSI Team Draft — Internal, Not for Public Distribution  ·  Date Code 2026-07-07 15:28 ET</a:t>
             </a:r>
             <a:endParaRPr lang="en-US" sz="900" dirty="0"/>
           </a:p>
@@ -10072,7 +10096,7 @@
                 <a:ea typeface="Calibri" pitchFamily="34" charset="-122"/>
                 <a:cs typeface="Calibri" pitchFamily="34" charset="-120"/>
               </a:rPr>
-              <a:t>Federal AAN — Executive Summary  ·  CSI Team Draft — Internal, Not for Public Distribution  ·  Date Code 2026-07-07 11:59 ET</a:t>
+              <a:t>Federal AAN — Executive Summary  ·  CSI Team Draft — Internal, Not for Public Distribution  ·  Date Code 2026-07-07 15:28 ET</a:t>
             </a:r>
             <a:endParaRPr lang="en-US" sz="900" dirty="0"/>
           </a:p>
@@ -10284,7 +10308,7 @@
                 <a:ea typeface="Calibri" pitchFamily="34" charset="-122"/>
                 <a:cs typeface="Calibri" pitchFamily="34" charset="-120"/>
               </a:rPr>
-              <a:t>Federal AAN — Executive Summary  ·  CSI Team Draft — Internal, Not for Public Distribution  ·  Date Code 2026-07-07 11:59 ET</a:t>
+              <a:t>Federal AAN — Executive Summary  ·  CSI Team Draft — Internal, Not for Public Distribution  ·  Date Code 2026-07-07 15:28 ET</a:t>
             </a:r>
             <a:endParaRPr lang="en-US" sz="900" dirty="0"/>
           </a:p>
@@ -10549,7 +10573,7 @@
                 <a:ea typeface="Calibri" pitchFamily="34" charset="-122"/>
                 <a:cs typeface="Calibri" pitchFamily="34" charset="-120"/>
               </a:rPr>
-              <a:t>Federal AAN — Executive Summary  ·  CSI Team Draft — Internal, Not for Public Distribution  ·  Date Code 2026-07-07 11:59 ET</a:t>
+              <a:t>Federal AAN — Executive Summary  ·  CSI Team Draft — Internal, Not for Public Distribution  ·  Date Code 2026-07-07 15:28 ET</a:t>
             </a:r>
             <a:endParaRPr lang="en-US" sz="900" dirty="0"/>
           </a:p>
@@ -10761,7 +10785,7 @@
                 <a:ea typeface="Calibri" pitchFamily="34" charset="-122"/>
                 <a:cs typeface="Calibri" pitchFamily="34" charset="-120"/>
               </a:rPr>
-              <a:t>Federal AAN — Executive Summary  ·  CSI Team Draft — Internal, Not for Public Distribution  ·  Date Code 2026-07-07 11:59 ET</a:t>
+              <a:t>Federal AAN — Executive Summary  ·  CSI Team Draft — Internal, Not for Public Distribution  ·  Date Code 2026-07-07 15:28 ET</a:t>
             </a:r>
             <a:endParaRPr lang="en-US" sz="900" dirty="0"/>
           </a:p>
@@ -10973,7 +10997,7 @@
                 <a:ea typeface="Calibri" pitchFamily="34" charset="-122"/>
                 <a:cs typeface="Calibri" pitchFamily="34" charset="-120"/>
               </a:rPr>
-              <a:t>Federal AAN — Executive Summary  ·  CSI Team Draft — Internal, Not for Public Distribution  ·  Date Code 2026-07-07 11:59 ET</a:t>
+              <a:t>Federal AAN — Executive Summary  ·  CSI Team Draft — Internal, Not for Public Distribution  ·  Date Code 2026-07-07 15:28 ET</a:t>
             </a:r>
             <a:endParaRPr lang="en-US" sz="900" dirty="0"/>
           </a:p>
@@ -11185,7 +11209,7 @@
                 <a:ea typeface="Calibri" pitchFamily="34" charset="-122"/>
                 <a:cs typeface="Calibri" pitchFamily="34" charset="-120"/>
               </a:rPr>
-              <a:t>Federal AAN — Executive Summary  ·  CSI Team Draft — Internal, Not for Public Distribution  ·  Date Code 2026-07-07 11:59 ET</a:t>
+              <a:t>Federal AAN — Executive Summary  ·  CSI Team Draft — Internal, Not for Public Distribution  ·  Date Code 2026-07-07 15:28 ET</a:t>
             </a:r>
             <a:endParaRPr lang="en-US" sz="900" dirty="0"/>
           </a:p>
